--- a/proposal/hu_single/chuangzhihui-single-event-ops-brief.pptx
+++ b/proposal/hu_single/chuangzhihui-single-event-ops-brief.pptx
@@ -14613,7 +14613,7 @@
                 </a:solidFill>
                 <a:latin typeface="Microsoft YaHei"/>
               </a:rPr>
-              <a:t>≤30人　｜　负责人约50%</a:t>
+              <a:t>≤30人　｜　负责人≤30%</a:t>
             </a:r>
           </a:p>
         </p:txBody>
@@ -15722,7 +15722,7 @@
                 </a:solidFill>
                 <a:latin typeface="Microsoft YaHei"/>
               </a:rPr>
-              <a:t>负责人占比适度承兑约50%</a:t>
+              <a:t>负责人占比≤30%</a:t>
             </a:r>
           </a:p>
           <a:p>
